--- a/output/stage3_methods_comparison.pptx
+++ b/output/stage3_methods_comparison.pptx
@@ -616,7 +616,7 @@
                 <c:formatCode>General</c:formatCode>
                 <c:ptCount val="3"/>
                 <c:pt idx="0">
-                  <c:v>9</c:v>
+                  <c:v>168.4</c:v>
                 </c:pt>
                 <c:pt idx="1">
                   <c:v>0</c:v>
@@ -884,26 +884,29 @@
           </c:marker>
           <c:cat>
             <c:multiLvlStrRef>
-              <c:f>Sheet1!$A$2:$A$7</c:f>
+              <c:f>Sheet1!$A$2:$A$8</c:f>
               <c:multiLvlStrCache>
-                <c:ptCount val="6"/>
+                <c:ptCount val="7"/>
                 <c:lvl>
                   <c:pt idx="0">
+                    <c:v>0.002%</c:v>
+                  </c:pt>
+                  <c:pt idx="1">
                     <c:v>0.05%</c:v>
                   </c:pt>
-                  <c:pt idx="1">
+                  <c:pt idx="2">
                     <c:v>0.1%</c:v>
                   </c:pt>
-                  <c:pt idx="2">
+                  <c:pt idx="3">
                     <c:v>0.2%</c:v>
                   </c:pt>
-                  <c:pt idx="3">
+                  <c:pt idx="4">
                     <c:v>0.3%</c:v>
                   </c:pt>
-                  <c:pt idx="4">
+                  <c:pt idx="5">
                     <c:v>0.5%</c:v>
                   </c:pt>
-                  <c:pt idx="5">
+                  <c:pt idx="6">
                     <c:v>1%</c:v>
                   </c:pt>
                 </c:lvl>
@@ -912,27 +915,30 @@
           </c:cat>
           <c:val>
             <c:numRef>
-              <c:f>Sheet1!$B$2:$B$7</c:f>
+              <c:f>Sheet1!$B$2:$B$8</c:f>
               <c:numCache>
                 <c:formatCode>General</c:formatCode>
-                <c:ptCount val="6"/>
+                <c:ptCount val="7"/>
                 <c:pt idx="0">
-                  <c:v>46</c:v>
+                  <c:v>1404</c:v>
                 </c:pt>
                 <c:pt idx="1">
-                  <c:v>46</c:v>
+                  <c:v>290</c:v>
                 </c:pt>
                 <c:pt idx="2">
-                  <c:v>46</c:v>
+                  <c:v>103</c:v>
                 </c:pt>
                 <c:pt idx="3">
-                  <c:v>46</c:v>
+                  <c:v>20</c:v>
                 </c:pt>
                 <c:pt idx="4">
-                  <c:v>33</c:v>
+                  <c:v>8</c:v>
                 </c:pt>
                 <c:pt idx="5">
-                  <c:v>25</c:v>
+                  <c:v>1</c:v>
+                </c:pt>
+                <c:pt idx="6">
+                  <c:v>0</c:v>
                 </c:pt>
               </c:numCache>
             </c:numRef>
@@ -1224,26 +1230,29 @@
           </c:marker>
           <c:cat>
             <c:multiLvlStrRef>
-              <c:f>Sheet1!$A$2:$A$7</c:f>
+              <c:f>Sheet1!$A$2:$A$8</c:f>
               <c:multiLvlStrCache>
-                <c:ptCount val="6"/>
+                <c:ptCount val="7"/>
                 <c:lvl>
                   <c:pt idx="0">
+                    <c:v>0.002%</c:v>
+                  </c:pt>
+                  <c:pt idx="1">
                     <c:v>0.05%</c:v>
                   </c:pt>
-                  <c:pt idx="1">
+                  <c:pt idx="2">
                     <c:v>0.1%</c:v>
                   </c:pt>
-                  <c:pt idx="2">
+                  <c:pt idx="3">
                     <c:v>0.2%</c:v>
                   </c:pt>
-                  <c:pt idx="3">
+                  <c:pt idx="4">
                     <c:v>0.3%</c:v>
                   </c:pt>
-                  <c:pt idx="4">
+                  <c:pt idx="5">
                     <c:v>0.5%</c:v>
                   </c:pt>
-                  <c:pt idx="5">
+                  <c:pt idx="6">
                     <c:v>1%</c:v>
                   </c:pt>
                 </c:lvl>
@@ -1252,27 +1261,30 @@
           </c:cat>
           <c:val>
             <c:numRef>
-              <c:f>Sheet1!$B$2:$B$7</c:f>
+              <c:f>Sheet1!$B$2:$B$8</c:f>
               <c:numCache>
                 <c:formatCode>General</c:formatCode>
-                <c:ptCount val="6"/>
+                <c:ptCount val="7"/>
                 <c:pt idx="0">
-                  <c:v>11.91</c:v>
+                  <c:v>6.23</c:v>
                 </c:pt>
                 <c:pt idx="1">
-                  <c:v>11.91</c:v>
+                  <c:v>4.09</c:v>
                 </c:pt>
                 <c:pt idx="2">
-                  <c:v>11.91</c:v>
+                  <c:v>4.03</c:v>
                 </c:pt>
                 <c:pt idx="3">
-                  <c:v>11.91</c:v>
+                  <c:v>4.01</c:v>
                 </c:pt>
                 <c:pt idx="4">
-                  <c:v>12.38</c:v>
+                  <c:v>3.98</c:v>
                 </c:pt>
                 <c:pt idx="5">
-                  <c:v>12.08</c:v>
+                  <c:v>3.98</c:v>
+                </c:pt>
+                <c:pt idx="6">
+                  <c:v>0</c:v>
                 </c:pt>
               </c:numCache>
             </c:numRef>
@@ -1574,22 +1586,22 @@
                 <c:formatCode>General</c:formatCode>
                 <c:ptCount val="6"/>
                 <c:pt idx="0">
-                  <c:v>100</c:v>
+                  <c:v>97.358</c:v>
                 </c:pt>
                 <c:pt idx="1">
-                  <c:v>98.43</c:v>
+                  <c:v>65.3671</c:v>
                 </c:pt>
                 <c:pt idx="2">
-                  <c:v>90.625</c:v>
+                  <c:v>37.0269</c:v>
                 </c:pt>
                 <c:pt idx="3">
-                  <c:v>56.565</c:v>
+                  <c:v>11.6691</c:v>
                 </c:pt>
                 <c:pt idx="4">
-                  <c:v>0.59</c:v>
+                  <c:v>0.9793</c:v>
                 </c:pt>
                 <c:pt idx="5">
-                  <c:v>0</c:v>
+                  <c:v>0.0287</c:v>
                 </c:pt>
               </c:numCache>
             </c:numRef>
@@ -3104,7 +3116,7 @@
           <a:p>
             <a:r>
               <a:rPr lang="en-US" dirty="0"/>
-              <a:t>The headline number: 557,823 n-grams were streamed and 99.9% of them were eliminated by the sketch before anything was shuffled. That is the whole point of using an approximate structure here — the saving is in the network, not the arithmetic.</a:t>
+              <a:t>The headline number: 22,273,314 n-grams were streamed and 99.9% of them were eliminated by the sketch before anything was shuffled. That is the whole point of using an approximate structure here — the saving is in the network, not the arithmetic.</a:t>
             </a:r>
             <a:endParaRPr lang="en-US" dirty="0"/>
           </a:p>
@@ -3829,7 +3841,7 @@
                 <a:ea typeface="Calibri" pitchFamily="34" charset="-122"/>
                 <a:cs typeface="Calibri" pitchFamily="34" charset="-120"/>
               </a:rPr>
-              <a:t>20,000 trips</a:t>
+              <a:t>1,602,542 trips</a:t>
             </a:r>
             <a:endParaRPr lang="en-US" sz="1300" dirty="0"/>
           </a:p>
@@ -3869,7 +3881,7 @@
                 <a:ea typeface="Calibri" pitchFamily="34" charset="-122"/>
                 <a:cs typeface="Calibri" pitchFamily="34" charset="-120"/>
               </a:rPr>
-              <a:t>46 verified corridors reported</a:t>
+              <a:t>1,404 verified corridors reported</a:t>
             </a:r>
             <a:endParaRPr lang="en-US" sz="1300" dirty="0"/>
           </a:p>
@@ -4554,7 +4566,7 @@
                 <a:ea typeface="Calibri" pitchFamily="34" charset="-122"/>
                 <a:cs typeface="Calibri" pitchFamily="34" charset="-120"/>
               </a:rPr>
-              <a:t>worst reported tortuosity 1.36, mean 1.25 — the shape of real roads</a:t>
+              <a:t>worst reported tortuosity 2.50, mean 1.55 — the shape of real roads</a:t>
             </a:r>
             <a:endParaRPr lang="en-US" sz="1150" dirty="0"/>
           </a:p>
@@ -4939,7 +4951,7 @@
                 <a:ea typeface="Calibri" pitchFamily="34" charset="-122"/>
                 <a:cs typeface="Calibri" pitchFamily="34" charset="-120"/>
               </a:rPr>
-              <a:t>Mined once at X = 0.30% (60 trips). Every higher threshold is a filter on measured supports, not another cluster run — which is also how the budget was kept.</a:t>
+              <a:t>Mined once at X = 0.00% (33 trips). Every higher threshold is a filter on measured supports, not another cluster run — which is also how the budget was kept.</a:t>
             </a:r>
             <a:endParaRPr lang="en-US" sz="1250" dirty="0"/>
           </a:p>
@@ -5573,13 +5585,13 @@
                       <a:r>
                         <a:rPr lang="en-US" sz="1150" b="1" dirty="0">
                           <a:solidFill>
-                            <a:srgbClr val="E9A13B"/>
+                            <a:srgbClr val="2E7D4F"/>
                           </a:solidFill>
                           <a:latin typeface="Calibri" pitchFamily="34" charset="0"/>
                           <a:ea typeface="Calibri" pitchFamily="34" charset="-122"/>
                           <a:cs typeface="Calibri" pitchFamily="34" charset="-120"/>
                         </a:rPr>
-                        <a:t>46</a:t>
+                        <a:t>103</a:t>
                       </a:r>
                       <a:endParaRPr lang="en-US" sz="1150" dirty="0">
                         <a:latin typeface="Calibri" charset="0"/>
@@ -5647,7 +5659,7 @@
                           <a:ea typeface="Calibri" pitchFamily="34" charset="-122"/>
                           <a:cs typeface="Calibri" pitchFamily="34" charset="-120"/>
                         </a:rPr>
-                        <a:t>0.30%</a:t>
+                        <a:t>0.10%</a:t>
                       </a:r>
                       <a:endParaRPr lang="en-US" sz="1150" dirty="0">
                         <a:latin typeface="Calibri" charset="0"/>
@@ -5715,7 +5727,7 @@
                           <a:ea typeface="Calibri" pitchFamily="34" charset="-122"/>
                           <a:cs typeface="Calibri" pitchFamily="34" charset="-120"/>
                         </a:rPr>
-                        <a:t>100.000%</a:t>
+                        <a:t>97.358%</a:t>
                       </a:r>
                       <a:endParaRPr lang="en-US" sz="1150" dirty="0">
                         <a:latin typeface="Calibri" charset="0"/>
@@ -5847,13 +5859,13 @@
                       <a:r>
                         <a:rPr lang="en-US" sz="1150" b="1" dirty="0">
                           <a:solidFill>
-                            <a:srgbClr val="E9A13B"/>
+                            <a:srgbClr val="2E7D4F"/>
                           </a:solidFill>
                           <a:latin typeface="Calibri" pitchFamily="34" charset="0"/>
                           <a:ea typeface="Calibri" pitchFamily="34" charset="-122"/>
                           <a:cs typeface="Calibri" pitchFamily="34" charset="-120"/>
                         </a:rPr>
-                        <a:t>46</a:t>
+                        <a:t>103</a:t>
                       </a:r>
                       <a:endParaRPr lang="en-US" sz="1150" dirty="0">
                         <a:latin typeface="Calibri" charset="0"/>
@@ -5921,7 +5933,7 @@
                           <a:ea typeface="Calibri" pitchFamily="34" charset="-122"/>
                           <a:cs typeface="Calibri" pitchFamily="34" charset="-120"/>
                         </a:rPr>
-                        <a:t>0.30%</a:t>
+                        <a:t>0.10%</a:t>
                       </a:r>
                       <a:endParaRPr lang="en-US" sz="1150" dirty="0">
                         <a:latin typeface="Calibri" charset="0"/>
@@ -5989,7 +6001,7 @@
                           <a:ea typeface="Calibri" pitchFamily="34" charset="-122"/>
                           <a:cs typeface="Calibri" pitchFamily="34" charset="-120"/>
                         </a:rPr>
-                        <a:t>98.430%</a:t>
+                        <a:t>65.367%</a:t>
                       </a:r>
                       <a:endParaRPr lang="en-US" sz="1150" dirty="0">
                         <a:latin typeface="Calibri" charset="0"/>
@@ -6121,13 +6133,13 @@
                       <a:r>
                         <a:rPr lang="en-US" sz="1150" b="1" dirty="0">
                           <a:solidFill>
-                            <a:srgbClr val="E9A13B"/>
+                            <a:srgbClr val="2E7D4F"/>
                           </a:solidFill>
                           <a:latin typeface="Calibri" pitchFamily="34" charset="0"/>
                           <a:ea typeface="Calibri" pitchFamily="34" charset="-122"/>
                           <a:cs typeface="Calibri" pitchFamily="34" charset="-120"/>
                         </a:rPr>
-                        <a:t>39</a:t>
+                        <a:t>491</a:t>
                       </a:r>
                       <a:endParaRPr lang="en-US" sz="1150" dirty="0">
                         <a:latin typeface="Calibri" charset="0"/>
@@ -6195,7 +6207,7 @@
                           <a:ea typeface="Calibri" pitchFamily="34" charset="-122"/>
                           <a:cs typeface="Calibri" pitchFamily="34" charset="-120"/>
                         </a:rPr>
-                        <a:t>0.30%</a:t>
+                        <a:t>0.00%</a:t>
                       </a:r>
                       <a:endParaRPr lang="en-US" sz="1150" dirty="0">
                         <a:latin typeface="Calibri" charset="0"/>
@@ -6263,7 +6275,7 @@
                           <a:ea typeface="Calibri" pitchFamily="34" charset="-122"/>
                           <a:cs typeface="Calibri" pitchFamily="34" charset="-120"/>
                         </a:rPr>
-                        <a:t>90.625%</a:t>
+                        <a:t>37.027%</a:t>
                       </a:r>
                       <a:endParaRPr lang="en-US" sz="1150" dirty="0">
                         <a:latin typeface="Calibri" charset="0"/>
@@ -6395,13 +6407,13 @@
                       <a:r>
                         <a:rPr lang="en-US" sz="1150" b="1" dirty="0">
                           <a:solidFill>
-                            <a:srgbClr val="E9A13B"/>
+                            <a:srgbClr val="2E7D4F"/>
                           </a:solidFill>
                           <a:latin typeface="Calibri" pitchFamily="34" charset="0"/>
                           <a:ea typeface="Calibri" pitchFamily="34" charset="-122"/>
                           <a:cs typeface="Calibri" pitchFamily="34" charset="-120"/>
                         </a:rPr>
-                        <a:t>38</a:t>
+                        <a:t>347</a:t>
                       </a:r>
                       <a:endParaRPr lang="en-US" sz="1150" dirty="0">
                         <a:latin typeface="Calibri" charset="0"/>
@@ -6469,7 +6481,7 @@
                           <a:ea typeface="Calibri" pitchFamily="34" charset="-122"/>
                           <a:cs typeface="Calibri" pitchFamily="34" charset="-120"/>
                         </a:rPr>
-                        <a:t>0.30%</a:t>
+                        <a:t>0.00%</a:t>
                       </a:r>
                       <a:endParaRPr lang="en-US" sz="1150" dirty="0">
                         <a:latin typeface="Calibri" charset="0"/>
@@ -6537,7 +6549,7 @@
                           <a:ea typeface="Calibri" pitchFamily="34" charset="-122"/>
                           <a:cs typeface="Calibri" pitchFamily="34" charset="-120"/>
                         </a:rPr>
-                        <a:t>56.565%</a:t>
+                        <a:t>11.669%</a:t>
                       </a:r>
                       <a:endParaRPr lang="en-US" sz="1150" dirty="0">
                         <a:latin typeface="Calibri" charset="0"/>
@@ -6743,7 +6755,7 @@
                           <a:ea typeface="Calibri" pitchFamily="34" charset="-122"/>
                           <a:cs typeface="Calibri" pitchFamily="34" charset="-120"/>
                         </a:rPr>
-                        <a:t>0.30%</a:t>
+                        <a:t>0.00%</a:t>
                       </a:r>
                       <a:endParaRPr lang="en-US" sz="1150" dirty="0">
                         <a:latin typeface="Calibri" charset="0"/>
@@ -6811,7 +6823,7 @@
                           <a:ea typeface="Calibri" pitchFamily="34" charset="-122"/>
                           <a:cs typeface="Calibri" pitchFamily="34" charset="-120"/>
                         </a:rPr>
-                        <a:t>0.590%</a:t>
+                        <a:t>0.979%</a:t>
                       </a:r>
                       <a:endParaRPr lang="en-US" sz="1150" dirty="0">
                         <a:latin typeface="Calibri" charset="0"/>
@@ -7017,7 +7029,7 @@
                           <a:ea typeface="Calibri" pitchFamily="34" charset="-122"/>
                           <a:cs typeface="Calibri" pitchFamily="34" charset="-120"/>
                         </a:rPr>
-                        <a:t>0.30%</a:t>
+                        <a:t>0.00%</a:t>
                       </a:r>
                       <a:endParaRPr lang="en-US" sz="1150" dirty="0">
                         <a:latin typeface="Calibri" charset="0"/>
@@ -7085,7 +7097,7 @@
                           <a:ea typeface="Calibri" pitchFamily="34" charset="-122"/>
                           <a:cs typeface="Calibri" pitchFamily="34" charset="-120"/>
                         </a:rPr>
-                        <a:t>0.000%</a:t>
+                        <a:t>0.029%</a:t>
                       </a:r>
                       <a:endParaRPr lang="en-US" sz="1150" dirty="0">
                         <a:latin typeface="Calibri" charset="0"/>
@@ -7599,7 +7611,7 @@
                 <a:ea typeface="Calibri" pitchFamily="34" charset="-122"/>
                 <a:cs typeface="Calibri" pitchFamily="34" charset="-120"/>
               </a:rPr>
-              <a:t>19,973 trips scored in 4.3s.</a:t>
+              <a:t>1,342,107 trips scored in 113.7s.</a:t>
             </a:r>
             <a:endParaRPr lang="en-US" sz="1150" dirty="0"/>
           </a:p>
@@ -8160,7 +8172,7 @@
                 <a:ea typeface="Calibri" pitchFamily="34" charset="-122"/>
                 <a:cs typeface="Calibri" pitchFamily="34" charset="-120"/>
               </a:rPr>
-              <a:t>893 candidates re-measured against all 20,000 trips; no support is inferred from its parts.</a:t>
+              <a:t>2,784 candidates re-measured against all 1,602,542 trips; no support is inferred from its parts.</a:t>
             </a:r>
             <a:endParaRPr lang="en-US" sz="1250" dirty="0"/>
           </a:p>
@@ -8411,7 +8423,7 @@
                 <a:ea typeface="Calibri" pitchFamily="34" charset="-122"/>
                 <a:cs typeface="Calibri" pitchFamily="34" charset="-120"/>
               </a:rPr>
-              <a:t>Full run: 224s · 46 corridors reported</a:t>
+              <a:t>Full run: 4,374s · 1,404 corridors reported</a:t>
             </a:r>
             <a:endParaRPr lang="en-US" sz="1100" dirty="0"/>
           </a:p>
@@ -9217,7 +9229,7 @@
                 <a:ea typeface="Calibri" pitchFamily="34" charset="-122"/>
                 <a:cs typeface="Calibri" pitchFamily="34" charset="-120"/>
               </a:rPr>
-              <a:t>9 of the reported corridors carry at least one hole.</a:t>
+              <a:t>18 of the reported corridors carry at least one hole.</a:t>
             </a:r>
             <a:endParaRPr lang="en-US" sz="1150" dirty="0"/>
           </a:p>
@@ -10310,7 +10322,7 @@
                 <a:ea typeface="Calibri" pitchFamily="34" charset="-122"/>
                 <a:cs typeface="Calibri" pitchFamily="34" charset="-120"/>
               </a:rPr>
-              <a:t>Every approximation here is one-sided: it may let an infrequent pattern through, never drop a frequent one. That makes each method safe as a candidate generator and moves the burden of accuracy onto a single exact pass — 893 candidates re-measured in 1.8s.</a:t>
+              <a:t>Every approximation here is one-sided: it may let an infrequent pattern through, never drop a frequent one. That makes each method safe as a candidate generator and moves the burden of accuracy onto a single exact pass — 2,784 candidates re-measured in 23.4s.</a:t>
             </a:r>
             <a:endParaRPr lang="en-US" sz="1250" dirty="0"/>
           </a:p>
@@ -10835,7 +10847,7 @@
                 <a:ea typeface="Calibri" pitchFamily="34" charset="-122"/>
                 <a:cs typeface="Calibri" pitchFamily="34" charset="-120"/>
               </a:rPr>
-              <a:t>Measured: 139,566 windows hashed, 786 buckets above the support floor, 31.3s.</a:t>
+              <a:t>Measured: 4,168,171 windows hashed, 104,181 buckets above the support floor, 749.7s.</a:t>
             </a:r>
             <a:endParaRPr lang="en-US" sz="1200" dirty="0"/>
           </a:p>
@@ -11425,7 +11437,7 @@
                 <a:ea typeface="Calibri" pitchFamily="34" charset="-122"/>
                 <a:cs typeface="Calibri" pitchFamily="34" charset="-120"/>
               </a:rPr>
-              <a:t>Naively every position emits a suffix: 538,369 of them.</a:t>
+              <a:t>Naively every position emits a suffix: 20,736,196 of them.</a:t>
             </a:r>
             <a:endParaRPr lang="en-US" sz="1150" dirty="0"/>
           </a:p>
@@ -11473,7 +11485,7 @@
                 <a:ea typeface="Calibri" pitchFamily="34" charset="-122"/>
                 <a:cs typeface="Calibri" pitchFamily="34" charset="-120"/>
               </a:rPr>
-              <a:t>47.0% never crossed the network — and by anti-monotonicity none of them could have produced a result.</a:t>
+              <a:t>2.3% never crossed the network — and by anti-monotonicity none of them could have produced a result.</a:t>
             </a:r>
             <a:endParaRPr lang="en-US" sz="1150" dirty="0"/>
           </a:p>
@@ -11497,7 +11509,7 @@
                 <a:ea typeface="Calibri" pitchFamily="34" charset="-122"/>
                 <a:cs typeface="Calibri" pitchFamily="34" charset="-120"/>
               </a:rPr>
-              <a:t>3,863 distinct repeats found in 6.5s.</a:t>
+              <a:t>526,541 distinct repeats found in 371.4s.</a:t>
             </a:r>
             <a:endParaRPr lang="en-US" sz="1150" dirty="0"/>
           </a:p>
@@ -11536,7 +11548,7 @@
                 <a:ea typeface="Calibri" pitchFamily="34" charset="-122"/>
                 <a:cs typeface="Calibri" pitchFamily="34" charset="-120"/>
               </a:rPr>
-              <a:t>Exact within its scope: supports here are true distinct-trip counts, capped only by the 40-cell suffix truncation that bounds per-bucket memory.</a:t>
+              <a:t>Exact within its scope: supports here are true distinct-trip counts, capped only by the 70-cell suffix truncation that bounds per-bucket memory.</a:t>
             </a:r>
             <a:endParaRPr lang="en-US" sz="1200" dirty="0"/>
           </a:p>
@@ -11958,7 +11970,7 @@
                 <a:ea typeface="Calibri" pitchFamily="34" charset="-122"/>
                 <a:cs typeface="Calibri" pitchFamily="34" charset="-120"/>
               </a:rPr>
-              <a:t>Growth removes it by construction: a corridor reaches length L only because a pass found 60 trips that traverse all L cells.</a:t>
+              <a:t>Growth removes it by construction: a corridor reaches length L only because a pass found 33 trips that traverse all L cells.</a:t>
             </a:r>
             <a:endParaRPr lang="en-US" sz="1150" dirty="0"/>
           </a:p>
@@ -12126,7 +12138,7 @@
                 <a:ea typeface="Calibri" pitchFamily="34" charset="-122"/>
                 <a:cs typeface="Calibri" pitchFamily="34" charset="-120"/>
               </a:rPr>
-              <a:t>386 frequent 4-gram seeds, grown forward only — leftward growth is redundant by anti-monotonicity.</a:t>
+              <a:t>25,214 frequent 4-gram seeds, grown forward only — leftward growth is redundant by anti-monotonicity.</a:t>
             </a:r>
             <a:endParaRPr lang="en-US" sz="1150" dirty="0"/>
           </a:p>
@@ -12198,7 +12210,7 @@
                 <a:ea typeface="Calibri" pitchFamily="34" charset="-122"/>
                 <a:cs typeface="Calibri" pitchFamily="34" charset="-120"/>
               </a:rPr>
-              <a:t>Converged after 35 rounds in 149.1s.</a:t>
+              <a:t>Converged after 29 rounds in 2,082.8s.</a:t>
             </a:r>
             <a:endParaRPr lang="en-US" sz="1150" dirty="0"/>
           </a:p>
@@ -12771,7 +12783,7 @@
                 <a:ea typeface="Cambria" pitchFamily="34" charset="-122"/>
                 <a:cs typeface="Cambria" pitchFamily="34" charset="-120"/>
               </a:rPr>
-              <a:t>0.5 KB</a:t>
+              <a:t>29.5 KB</a:t>
             </a:r>
             <a:endParaRPr lang="en-US" sz="2400" dirty="0"/>
           </a:p>
@@ -12891,7 +12903,7 @@
                 <a:ea typeface="Cambria" pitchFamily="34" charset="-122"/>
                 <a:cs typeface="Cambria" pitchFamily="34" charset="-120"/>
               </a:rPr>
-              <a:t>47.0%</a:t>
+              <a:t>2.3%</a:t>
             </a:r>
             <a:endParaRPr lang="en-US" sz="2400" dirty="0"/>
           </a:p>
@@ -13871,7 +13883,7 @@
                           <a:ea typeface="Calibri" pitchFamily="34" charset="-122"/>
                           <a:cs typeface="Calibri" pitchFamily="34" charset="-120"/>
                         </a:rPr>
-                        <a:t>0.5 KB</a:t>
+                        <a:t>29.5 KB</a:t>
                       </a:r>
                       <a:endParaRPr lang="en-US" sz="1150" dirty="0">
                         <a:latin typeface="Calibri" charset="0"/>
@@ -15369,7 +15381,7 @@
                           <a:ea typeface="Calibri" pitchFamily="34" charset="-122"/>
                           <a:cs typeface="Calibri" pitchFamily="34" charset="-120"/>
                         </a:rPr>
-                        <a:t>31.3 s</a:t>
+                        <a:t>749.7 s</a:t>
                       </a:r>
                       <a:endParaRPr lang="en-US" sz="1150" dirty="0">
                         <a:latin typeface="Calibri" charset="0"/>
@@ -15437,7 +15449,7 @@
                           <a:ea typeface="Calibri" pitchFamily="34" charset="-122"/>
                           <a:cs typeface="Calibri" pitchFamily="34" charset="-120"/>
                         </a:rPr>
-                        <a:t>157</a:t>
+                        <a:t>1,322</a:t>
                       </a:r>
                       <a:endParaRPr lang="en-US" sz="1150" dirty="0">
                         <a:latin typeface="Calibri" charset="0"/>
@@ -15505,7 +15517,7 @@
                           <a:ea typeface="Calibri" pitchFamily="34" charset="-122"/>
                           <a:cs typeface="Calibri" pitchFamily="34" charset="-120"/>
                         </a:rPr>
-                        <a:t>4.02 km</a:t>
+                        <a:t>5.70 km</a:t>
                       </a:r>
                       <a:endParaRPr lang="en-US" sz="1150" dirty="0">
                         <a:latin typeface="Calibri" charset="0"/>
@@ -15573,7 +15585,7 @@
                           <a:ea typeface="Calibri" pitchFamily="34" charset="-122"/>
                           <a:cs typeface="Calibri" pitchFamily="34" charset="-120"/>
                         </a:rPr>
-                        <a:t>4.00 km</a:t>
+                        <a:t>4.14 km</a:t>
                       </a:r>
                       <a:endParaRPr lang="en-US" sz="1150" dirty="0">
                         <a:latin typeface="Calibri" charset="0"/>
@@ -15777,7 +15789,7 @@
                           <a:ea typeface="Calibri" pitchFamily="34" charset="-122"/>
                           <a:cs typeface="Calibri" pitchFamily="34" charset="-120"/>
                         </a:rPr>
-                        <a:t>9.0%</a:t>
+                        <a:t>168.4%</a:t>
                       </a:r>
                       <a:endParaRPr lang="en-US" sz="1150" dirty="0">
                         <a:latin typeface="Calibri" charset="0"/>
@@ -15915,7 +15927,7 @@
                           <a:ea typeface="Calibri" pitchFamily="34" charset="-122"/>
                           <a:cs typeface="Calibri" pitchFamily="34" charset="-120"/>
                         </a:rPr>
-                        <a:t>6.5 s</a:t>
+                        <a:t>371.4 s</a:t>
                       </a:r>
                       <a:endParaRPr lang="en-US" sz="1150" dirty="0">
                         <a:latin typeface="Calibri" charset="0"/>
@@ -15983,7 +15995,7 @@
                           <a:ea typeface="Calibri" pitchFamily="34" charset="-122"/>
                           <a:cs typeface="Calibri" pitchFamily="34" charset="-120"/>
                         </a:rPr>
-                        <a:t>666</a:t>
+                        <a:t>1,333</a:t>
                       </a:r>
                       <a:endParaRPr lang="en-US" sz="1150" dirty="0">
                         <a:latin typeface="Calibri" charset="0"/>
@@ -16051,7 +16063,7 @@
                           <a:ea typeface="Calibri" pitchFamily="34" charset="-122"/>
                           <a:cs typeface="Calibri" pitchFamily="34" charset="-120"/>
                         </a:rPr>
-                        <a:t>14.22 km</a:t>
+                        <a:t>12.78 km</a:t>
                       </a:r>
                       <a:endParaRPr lang="en-US" sz="1150" dirty="0">
                         <a:latin typeface="Calibri" charset="0"/>
@@ -16119,7 +16131,7 @@
                           <a:ea typeface="Calibri" pitchFamily="34" charset="-122"/>
                           <a:cs typeface="Calibri" pitchFamily="34" charset="-120"/>
                         </a:rPr>
-                        <a:t>11.45 km</a:t>
+                        <a:t>10.35 km</a:t>
                       </a:r>
                       <a:endParaRPr lang="en-US" sz="1150" dirty="0">
                         <a:latin typeface="Calibri" charset="0"/>
@@ -16187,7 +16199,7 @@
                           <a:ea typeface="Calibri" pitchFamily="34" charset="-122"/>
                           <a:cs typeface="Calibri" pitchFamily="34" charset="-120"/>
                         </a:rPr>
-                        <a:t>32.5</a:t>
+                        <a:t>29.1</a:t>
                       </a:r>
                       <a:endParaRPr lang="en-US" sz="1150" dirty="0">
                         <a:latin typeface="Calibri" charset="0"/>
@@ -16461,7 +16473,7 @@
                           <a:ea typeface="Calibri" pitchFamily="34" charset="-122"/>
                           <a:cs typeface="Calibri" pitchFamily="34" charset="-120"/>
                         </a:rPr>
-                        <a:t>149.1 s</a:t>
+                        <a:t>2,082.8 s</a:t>
                       </a:r>
                       <a:endParaRPr lang="en-US" sz="1150" dirty="0">
                         <a:latin typeface="Calibri" charset="0"/>
@@ -16529,7 +16541,7 @@
                           <a:ea typeface="Calibri" pitchFamily="34" charset="-122"/>
                           <a:cs typeface="Calibri" pitchFamily="34" charset="-120"/>
                         </a:rPr>
-                        <a:t>27</a:t>
+                        <a:t>118</a:t>
                       </a:r>
                       <a:endParaRPr lang="en-US" sz="1150" dirty="0">
                         <a:latin typeface="Calibri" charset="0"/>
@@ -16597,7 +16609,7 @@
                           <a:ea typeface="Calibri" pitchFamily="34" charset="-122"/>
                           <a:cs typeface="Calibri" pitchFamily="34" charset="-120"/>
                         </a:rPr>
-                        <a:t>15.60 km</a:t>
+                        <a:t>18.48 km</a:t>
                       </a:r>
                       <a:endParaRPr lang="en-US" sz="1150" dirty="0">
                         <a:latin typeface="Calibri" charset="0"/>
@@ -16665,7 +16677,7 @@
                           <a:ea typeface="Calibri" pitchFamily="34" charset="-122"/>
                           <a:cs typeface="Calibri" pitchFamily="34" charset="-120"/>
                         </a:rPr>
-                        <a:t>7.06 km</a:t>
+                        <a:t>7.76 km</a:t>
                       </a:r>
                       <a:endParaRPr lang="en-US" sz="1150" dirty="0">
                         <a:latin typeface="Calibri" charset="0"/>
@@ -16733,7 +16745,7 @@
                           <a:ea typeface="Calibri" pitchFamily="34" charset="-122"/>
                           <a:cs typeface="Calibri" pitchFamily="34" charset="-120"/>
                         </a:rPr>
-                        <a:t>18.9</a:t>
+                        <a:t>17.1</a:t>
                       </a:r>
                       <a:endParaRPr lang="en-US" sz="1150" dirty="0">
                         <a:latin typeface="Calibri" charset="0"/>
@@ -16801,7 +16813,7 @@
                           <a:ea typeface="Calibri" pitchFamily="34" charset="-122"/>
                           <a:cs typeface="Calibri" pitchFamily="34" charset="-120"/>
                         </a:rPr>
-                        <a:t>9</a:t>
+                        <a:t>97</a:t>
                       </a:r>
                       <a:endParaRPr lang="en-US" sz="1150" dirty="0">
                         <a:latin typeface="Calibri" charset="0"/>

--- a/output/stage3_methods_comparison.pptx
+++ b/output/stage3_methods_comparison.pptx
@@ -616,7 +616,7 @@
                 <c:formatCode>General</c:formatCode>
                 <c:ptCount val="3"/>
                 <c:pt idx="0">
-                  <c:v>168.4</c:v>
+                  <c:v>172.68</c:v>
                 </c:pt>
                 <c:pt idx="1">
                   <c:v>0</c:v>
@@ -920,19 +920,19 @@
                 <c:formatCode>General</c:formatCode>
                 <c:ptCount val="7"/>
                 <c:pt idx="0">
-                  <c:v>1404</c:v>
+                  <c:v>1380</c:v>
                 </c:pt>
                 <c:pt idx="1">
-                  <c:v>290</c:v>
+                  <c:v>304</c:v>
                 </c:pt>
                 <c:pt idx="2">
-                  <c:v>103</c:v>
+                  <c:v>106</c:v>
                 </c:pt>
                 <c:pt idx="3">
-                  <c:v>20</c:v>
+                  <c:v>25</c:v>
                 </c:pt>
                 <c:pt idx="4">
-                  <c:v>8</c:v>
+                  <c:v>9</c:v>
                 </c:pt>
                 <c:pt idx="5">
                   <c:v>1</c:v>
@@ -1266,16 +1266,16 @@
                 <c:formatCode>General</c:formatCode>
                 <c:ptCount val="7"/>
                 <c:pt idx="0">
-                  <c:v>6.23</c:v>
+                  <c:v>6.08</c:v>
                 </c:pt>
                 <c:pt idx="1">
                   <c:v>4.09</c:v>
                 </c:pt>
                 <c:pt idx="2">
-                  <c:v>4.03</c:v>
+                  <c:v>4.04</c:v>
                 </c:pt>
                 <c:pt idx="3">
-                  <c:v>4.01</c:v>
+                  <c:v>4.02</c:v>
                 </c:pt>
                 <c:pt idx="4">
                   <c:v>3.98</c:v>
@@ -1586,22 +1586,22 @@
                 <c:formatCode>General</c:formatCode>
                 <c:ptCount val="6"/>
                 <c:pt idx="0">
-                  <c:v>97.358</c:v>
+                  <c:v>97.3759</c:v>
                 </c:pt>
                 <c:pt idx="1">
-                  <c:v>65.3671</c:v>
+                  <c:v>65.6552</c:v>
                 </c:pt>
                 <c:pt idx="2">
-                  <c:v>37.0269</c:v>
+                  <c:v>37.5545</c:v>
                 </c:pt>
                 <c:pt idx="3">
-                  <c:v>11.6691</c:v>
+                  <c:v>12.4046</c:v>
                 </c:pt>
                 <c:pt idx="4">
-                  <c:v>0.9793</c:v>
+                  <c:v>1.5603</c:v>
                 </c:pt>
                 <c:pt idx="5">
-                  <c:v>0.0287</c:v>
+                  <c:v>0.2171</c:v>
                 </c:pt>
               </c:numCache>
             </c:numRef>
@@ -3116,7 +3116,7 @@
           <a:p>
             <a:r>
               <a:rPr lang="en-US" dirty="0"/>
-              <a:t>The headline number: 22,273,314 n-grams were streamed and 99.9% of them were eliminated by the sketch before anything was shuffled. That is the whole point of using an approximate structure here — the saving is in the network, not the arithmetic.</a:t>
+              <a:t>The headline number: 23,354,267 n-grams were streamed and 99.9% of them were eliminated by the sketch before anything was shuffled. That is the whole point of using an approximate structure here — the saving is in the network, not the arithmetic.</a:t>
             </a:r>
             <a:endParaRPr lang="en-US" dirty="0"/>
           </a:p>
@@ -3841,7 +3841,7 @@
                 <a:ea typeface="Calibri" pitchFamily="34" charset="-122"/>
                 <a:cs typeface="Calibri" pitchFamily="34" charset="-120"/>
               </a:rPr>
-              <a:t>1,602,542 trips</a:t>
+              <a:t>1,616,575 trips</a:t>
             </a:r>
             <a:endParaRPr lang="en-US" sz="1300" dirty="0"/>
           </a:p>
@@ -3881,7 +3881,7 @@
                 <a:ea typeface="Calibri" pitchFamily="34" charset="-122"/>
                 <a:cs typeface="Calibri" pitchFamily="34" charset="-120"/>
               </a:rPr>
-              <a:t>1,404 verified corridors reported</a:t>
+              <a:t>1,380 verified corridors reported</a:t>
             </a:r>
             <a:endParaRPr lang="en-US" sz="1300" dirty="0"/>
           </a:p>
@@ -4566,7 +4566,7 @@
                 <a:ea typeface="Calibri" pitchFamily="34" charset="-122"/>
                 <a:cs typeface="Calibri" pitchFamily="34" charset="-120"/>
               </a:rPr>
-              <a:t>worst reported tortuosity 2.50, mean 1.55 — the shape of real roads</a:t>
+              <a:t>worst reported tortuosity 2.48, mean 1.52 — the shape of real roads</a:t>
             </a:r>
             <a:endParaRPr lang="en-US" sz="1150" dirty="0"/>
           </a:p>
@@ -5591,7 +5591,7 @@
                           <a:ea typeface="Calibri" pitchFamily="34" charset="-122"/>
                           <a:cs typeface="Calibri" pitchFamily="34" charset="-120"/>
                         </a:rPr>
-                        <a:t>103</a:t>
+                        <a:t>106</a:t>
                       </a:r>
                       <a:endParaRPr lang="en-US" sz="1150" dirty="0">
                         <a:latin typeface="Calibri" charset="0"/>
@@ -5727,7 +5727,7 @@
                           <a:ea typeface="Calibri" pitchFamily="34" charset="-122"/>
                           <a:cs typeface="Calibri" pitchFamily="34" charset="-120"/>
                         </a:rPr>
-                        <a:t>97.358%</a:t>
+                        <a:t>97.376%</a:t>
                       </a:r>
                       <a:endParaRPr lang="en-US" sz="1150" dirty="0">
                         <a:latin typeface="Calibri" charset="0"/>
@@ -5865,7 +5865,7 @@
                           <a:ea typeface="Calibri" pitchFamily="34" charset="-122"/>
                           <a:cs typeface="Calibri" pitchFamily="34" charset="-120"/>
                         </a:rPr>
-                        <a:t>103</a:t>
+                        <a:t>106</a:t>
                       </a:r>
                       <a:endParaRPr lang="en-US" sz="1150" dirty="0">
                         <a:latin typeface="Calibri" charset="0"/>
@@ -6001,7 +6001,7 @@
                           <a:ea typeface="Calibri" pitchFamily="34" charset="-122"/>
                           <a:cs typeface="Calibri" pitchFamily="34" charset="-120"/>
                         </a:rPr>
-                        <a:t>65.367%</a:t>
+                        <a:t>65.655%</a:t>
                       </a:r>
                       <a:endParaRPr lang="en-US" sz="1150" dirty="0">
                         <a:latin typeface="Calibri" charset="0"/>
@@ -6139,7 +6139,7 @@
                           <a:ea typeface="Calibri" pitchFamily="34" charset="-122"/>
                           <a:cs typeface="Calibri" pitchFamily="34" charset="-120"/>
                         </a:rPr>
-                        <a:t>491</a:t>
+                        <a:t>436</a:t>
                       </a:r>
                       <a:endParaRPr lang="en-US" sz="1150" dirty="0">
                         <a:latin typeface="Calibri" charset="0"/>
@@ -6275,7 +6275,7 @@
                           <a:ea typeface="Calibri" pitchFamily="34" charset="-122"/>
                           <a:cs typeface="Calibri" pitchFamily="34" charset="-120"/>
                         </a:rPr>
-                        <a:t>37.027%</a:t>
+                        <a:t>37.555%</a:t>
                       </a:r>
                       <a:endParaRPr lang="en-US" sz="1150" dirty="0">
                         <a:latin typeface="Calibri" charset="0"/>
@@ -6413,7 +6413,7 @@
                           <a:ea typeface="Calibri" pitchFamily="34" charset="-122"/>
                           <a:cs typeface="Calibri" pitchFamily="34" charset="-120"/>
                         </a:rPr>
-                        <a:t>347</a:t>
+                        <a:t>339</a:t>
                       </a:r>
                       <a:endParaRPr lang="en-US" sz="1150" dirty="0">
                         <a:latin typeface="Calibri" charset="0"/>
@@ -6549,7 +6549,7 @@
                           <a:ea typeface="Calibri" pitchFamily="34" charset="-122"/>
                           <a:cs typeface="Calibri" pitchFamily="34" charset="-120"/>
                         </a:rPr>
-                        <a:t>11.669%</a:t>
+                        <a:t>12.405%</a:t>
                       </a:r>
                       <a:endParaRPr lang="en-US" sz="1150" dirty="0">
                         <a:latin typeface="Calibri" charset="0"/>
@@ -6823,7 +6823,7 @@
                           <a:ea typeface="Calibri" pitchFamily="34" charset="-122"/>
                           <a:cs typeface="Calibri" pitchFamily="34" charset="-120"/>
                         </a:rPr>
-                        <a:t>0.979%</a:t>
+                        <a:t>1.560%</a:t>
                       </a:r>
                       <a:endParaRPr lang="en-US" sz="1150" dirty="0">
                         <a:latin typeface="Calibri" charset="0"/>
@@ -7097,7 +7097,7 @@
                           <a:ea typeface="Calibri" pitchFamily="34" charset="-122"/>
                           <a:cs typeface="Calibri" pitchFamily="34" charset="-120"/>
                         </a:rPr>
-                        <a:t>0.029%</a:t>
+                        <a:t>0.217%</a:t>
                       </a:r>
                       <a:endParaRPr lang="en-US" sz="1150" dirty="0">
                         <a:latin typeface="Calibri" charset="0"/>
@@ -7611,7 +7611,7 @@
                 <a:ea typeface="Calibri" pitchFamily="34" charset="-122"/>
                 <a:cs typeface="Calibri" pitchFamily="34" charset="-120"/>
               </a:rPr>
-              <a:t>1,342,107 trips scored in 113.7s.</a:t>
+              <a:t>1,355,986 trips scored in 108.6s.</a:t>
             </a:r>
             <a:endParaRPr lang="en-US" sz="1150" dirty="0"/>
           </a:p>
@@ -8172,7 +8172,7 @@
                 <a:ea typeface="Calibri" pitchFamily="34" charset="-122"/>
                 <a:cs typeface="Calibri" pitchFamily="34" charset="-120"/>
               </a:rPr>
-              <a:t>2,784 candidates re-measured against all 1,602,542 trips; no support is inferred from its parts.</a:t>
+              <a:t>2,782 candidates re-measured against all 1,616,575 trips; no support is inferred from its parts.</a:t>
             </a:r>
             <a:endParaRPr lang="en-US" sz="1250" dirty="0"/>
           </a:p>
@@ -8423,7 +8423,7 @@
                 <a:ea typeface="Calibri" pitchFamily="34" charset="-122"/>
                 <a:cs typeface="Calibri" pitchFamily="34" charset="-120"/>
               </a:rPr>
-              <a:t>Full run: 4,374s · 1,404 corridors reported</a:t>
+              <a:t>Full run: 4,798s · 1,380 corridors reported</a:t>
             </a:r>
             <a:endParaRPr lang="en-US" sz="1100" dirty="0"/>
           </a:p>
@@ -9229,7 +9229,7 @@
                 <a:ea typeface="Calibri" pitchFamily="34" charset="-122"/>
                 <a:cs typeface="Calibri" pitchFamily="34" charset="-120"/>
               </a:rPr>
-              <a:t>18 of the reported corridors carry at least one hole.</a:t>
+              <a:t>20 of the reported corridors carry at least one hole.</a:t>
             </a:r>
             <a:endParaRPr lang="en-US" sz="1150" dirty="0"/>
           </a:p>
@@ -10322,7 +10322,7 @@
                 <a:ea typeface="Calibri" pitchFamily="34" charset="-122"/>
                 <a:cs typeface="Calibri" pitchFamily="34" charset="-120"/>
               </a:rPr>
-              <a:t>Every approximation here is one-sided: it may let an infrequent pattern through, never drop a frequent one. That makes each method safe as a candidate generator and moves the burden of accuracy onto a single exact pass — 2,784 candidates re-measured in 23.4s.</a:t>
+              <a:t>Every approximation here is one-sided: it may let an infrequent pattern through, never drop a frequent one. That makes each method safe as a candidate generator and moves the burden of accuracy onto a single exact pass — 2,782 candidates re-measured in 24.4s.</a:t>
             </a:r>
             <a:endParaRPr lang="en-US" sz="1250" dirty="0"/>
           </a:p>
@@ -10847,7 +10847,7 @@
                 <a:ea typeface="Calibri" pitchFamily="34" charset="-122"/>
                 <a:cs typeface="Calibri" pitchFamily="34" charset="-120"/>
               </a:rPr>
-              <a:t>Measured: 4,168,171 windows hashed, 104,181 buckets above the support floor, 749.7s.</a:t>
+              <a:t>Measured: 4,496,659 windows hashed, 111,775 buckets above the support floor, 949.6s.</a:t>
             </a:r>
             <a:endParaRPr lang="en-US" sz="1200" dirty="0"/>
           </a:p>
@@ -11437,7 +11437,7 @@
                 <a:ea typeface="Calibri" pitchFamily="34" charset="-122"/>
                 <a:cs typeface="Calibri" pitchFamily="34" charset="-120"/>
               </a:rPr>
-              <a:t>Naively every position emits a suffix: 20,736,196 of them.</a:t>
+              <a:t>Naively every position emits a suffix: 21,805,095 of them.</a:t>
             </a:r>
             <a:endParaRPr lang="en-US" sz="1150" dirty="0"/>
           </a:p>
@@ -11485,7 +11485,7 @@
                 <a:ea typeface="Calibri" pitchFamily="34" charset="-122"/>
                 <a:cs typeface="Calibri" pitchFamily="34" charset="-120"/>
               </a:rPr>
-              <a:t>2.3% never crossed the network — and by anti-monotonicity none of them could have produced a result.</a:t>
+              <a:t>3.3% never crossed the network — and by anti-monotonicity none of them could have produced a result.</a:t>
             </a:r>
             <a:endParaRPr lang="en-US" sz="1150" dirty="0"/>
           </a:p>
@@ -11509,7 +11509,7 @@
                 <a:ea typeface="Calibri" pitchFamily="34" charset="-122"/>
                 <a:cs typeface="Calibri" pitchFamily="34" charset="-120"/>
               </a:rPr>
-              <a:t>526,541 distinct repeats found in 371.4s.</a:t>
+              <a:t>561,043 distinct repeats found in 395.5s.</a:t>
             </a:r>
             <a:endParaRPr lang="en-US" sz="1150" dirty="0"/>
           </a:p>
@@ -12138,7 +12138,7 @@
                 <a:ea typeface="Calibri" pitchFamily="34" charset="-122"/>
                 <a:cs typeface="Calibri" pitchFamily="34" charset="-120"/>
               </a:rPr>
-              <a:t>25,214 frequent 4-gram seeds, grown forward only — leftward growth is redundant by anti-monotonicity.</a:t>
+              <a:t>29,234 frequent 4-gram seeds, grown forward only — leftward growth is redundant by anti-monotonicity.</a:t>
             </a:r>
             <a:endParaRPr lang="en-US" sz="1150" dirty="0"/>
           </a:p>
@@ -12210,7 +12210,7 @@
                 <a:ea typeface="Calibri" pitchFamily="34" charset="-122"/>
                 <a:cs typeface="Calibri" pitchFamily="34" charset="-120"/>
               </a:rPr>
-              <a:t>Converged after 29 rounds in 2,082.8s.</a:t>
+              <a:t>Converged after 34 rounds in 2,257.8s.</a:t>
             </a:r>
             <a:endParaRPr lang="en-US" sz="1150" dirty="0"/>
           </a:p>
@@ -12783,7 +12783,7 @@
                 <a:ea typeface="Cambria" pitchFamily="34" charset="-122"/>
                 <a:cs typeface="Cambria" pitchFamily="34" charset="-120"/>
               </a:rPr>
-              <a:t>29.5 KB</a:t>
+              <a:t>34.2 KB</a:t>
             </a:r>
             <a:endParaRPr lang="en-US" sz="2400" dirty="0"/>
           </a:p>
@@ -12903,7 +12903,7 @@
                 <a:ea typeface="Cambria" pitchFamily="34" charset="-122"/>
                 <a:cs typeface="Cambria" pitchFamily="34" charset="-120"/>
               </a:rPr>
-              <a:t>2.3%</a:t>
+              <a:t>3.3%</a:t>
             </a:r>
             <a:endParaRPr lang="en-US" sz="2400" dirty="0"/>
           </a:p>
@@ -13883,7 +13883,7 @@
                           <a:ea typeface="Calibri" pitchFamily="34" charset="-122"/>
                           <a:cs typeface="Calibri" pitchFamily="34" charset="-120"/>
                         </a:rPr>
-                        <a:t>29.5 KB</a:t>
+                        <a:t>34.2 KB</a:t>
                       </a:r>
                       <a:endParaRPr lang="en-US" sz="1150" dirty="0">
                         <a:latin typeface="Calibri" charset="0"/>
@@ -15381,7 +15381,7 @@
                           <a:ea typeface="Calibri" pitchFamily="34" charset="-122"/>
                           <a:cs typeface="Calibri" pitchFamily="34" charset="-120"/>
                         </a:rPr>
-                        <a:t>749.7 s</a:t>
+                        <a:t>949.6 s</a:t>
                       </a:r>
                       <a:endParaRPr lang="en-US" sz="1150" dirty="0">
                         <a:latin typeface="Calibri" charset="0"/>
@@ -15449,7 +15449,7 @@
                           <a:ea typeface="Calibri" pitchFamily="34" charset="-122"/>
                           <a:cs typeface="Calibri" pitchFamily="34" charset="-120"/>
                         </a:rPr>
-                        <a:t>1,322</a:t>
+                        <a:t>1,320</a:t>
                       </a:r>
                       <a:endParaRPr lang="en-US" sz="1150" dirty="0">
                         <a:latin typeface="Calibri" charset="0"/>
@@ -15517,7 +15517,7 @@
                           <a:ea typeface="Calibri" pitchFamily="34" charset="-122"/>
                           <a:cs typeface="Calibri" pitchFamily="34" charset="-120"/>
                         </a:rPr>
-                        <a:t>5.70 km</a:t>
+                        <a:t>5.42 km</a:t>
                       </a:r>
                       <a:endParaRPr lang="en-US" sz="1150" dirty="0">
                         <a:latin typeface="Calibri" charset="0"/>
@@ -15585,7 +15585,7 @@
                           <a:ea typeface="Calibri" pitchFamily="34" charset="-122"/>
                           <a:cs typeface="Calibri" pitchFamily="34" charset="-120"/>
                         </a:rPr>
-                        <a:t>4.14 km</a:t>
+                        <a:t>4.15 km</a:t>
                       </a:r>
                       <a:endParaRPr lang="en-US" sz="1150" dirty="0">
                         <a:latin typeface="Calibri" charset="0"/>
@@ -15789,7 +15789,7 @@
                           <a:ea typeface="Calibri" pitchFamily="34" charset="-122"/>
                           <a:cs typeface="Calibri" pitchFamily="34" charset="-120"/>
                         </a:rPr>
-                        <a:t>168.4%</a:t>
+                        <a:t>172.7%</a:t>
                       </a:r>
                       <a:endParaRPr lang="en-US" sz="1150" dirty="0">
                         <a:latin typeface="Calibri" charset="0"/>
@@ -15927,7 +15927,7 @@
                           <a:ea typeface="Calibri" pitchFamily="34" charset="-122"/>
                           <a:cs typeface="Calibri" pitchFamily="34" charset="-120"/>
                         </a:rPr>
-                        <a:t>371.4 s</a:t>
+                        <a:t>395.5 s</a:t>
                       </a:r>
                       <a:endParaRPr lang="en-US" sz="1150" dirty="0">
                         <a:latin typeface="Calibri" charset="0"/>
@@ -16063,7 +16063,7 @@
                           <a:ea typeface="Calibri" pitchFamily="34" charset="-122"/>
                           <a:cs typeface="Calibri" pitchFamily="34" charset="-120"/>
                         </a:rPr>
-                        <a:t>12.78 km</a:t>
+                        <a:t>13.51 km</a:t>
                       </a:r>
                       <a:endParaRPr lang="en-US" sz="1150" dirty="0">
                         <a:latin typeface="Calibri" charset="0"/>
@@ -16131,7 +16131,7 @@
                           <a:ea typeface="Calibri" pitchFamily="34" charset="-122"/>
                           <a:cs typeface="Calibri" pitchFamily="34" charset="-120"/>
                         </a:rPr>
-                        <a:t>10.35 km</a:t>
+                        <a:t>10.46 km</a:t>
                       </a:r>
                       <a:endParaRPr lang="en-US" sz="1150" dirty="0">
                         <a:latin typeface="Calibri" charset="0"/>
@@ -16199,7 +16199,7 @@
                           <a:ea typeface="Calibri" pitchFamily="34" charset="-122"/>
                           <a:cs typeface="Calibri" pitchFamily="34" charset="-120"/>
                         </a:rPr>
-                        <a:t>29.1</a:t>
+                        <a:t>29.5</a:t>
                       </a:r>
                       <a:endParaRPr lang="en-US" sz="1150" dirty="0">
                         <a:latin typeface="Calibri" charset="0"/>
@@ -16473,7 +16473,7 @@
                           <a:ea typeface="Calibri" pitchFamily="34" charset="-122"/>
                           <a:cs typeface="Calibri" pitchFamily="34" charset="-120"/>
                         </a:rPr>
-                        <a:t>2,082.8 s</a:t>
+                        <a:t>2,257.8 s</a:t>
                       </a:r>
                       <a:endParaRPr lang="en-US" sz="1150" dirty="0">
                         <a:latin typeface="Calibri" charset="0"/>
@@ -16541,7 +16541,7 @@
                           <a:ea typeface="Calibri" pitchFamily="34" charset="-122"/>
                           <a:cs typeface="Calibri" pitchFamily="34" charset="-120"/>
                         </a:rPr>
-                        <a:t>118</a:t>
+                        <a:t>116</a:t>
                       </a:r>
                       <a:endParaRPr lang="en-US" sz="1150" dirty="0">
                         <a:latin typeface="Calibri" charset="0"/>
@@ -16677,7 +16677,7 @@
                           <a:ea typeface="Calibri" pitchFamily="34" charset="-122"/>
                           <a:cs typeface="Calibri" pitchFamily="34" charset="-120"/>
                         </a:rPr>
-                        <a:t>7.76 km</a:t>
+                        <a:t>7.94 km</a:t>
                       </a:r>
                       <a:endParaRPr lang="en-US" sz="1150" dirty="0">
                         <a:latin typeface="Calibri" charset="0"/>
@@ -16745,7 +16745,7 @@
                           <a:ea typeface="Calibri" pitchFamily="34" charset="-122"/>
                           <a:cs typeface="Calibri" pitchFamily="34" charset="-120"/>
                         </a:rPr>
-                        <a:t>17.1</a:t>
+                        <a:t>17.2</a:t>
                       </a:r>
                       <a:endParaRPr lang="en-US" sz="1150" dirty="0">
                         <a:latin typeface="Calibri" charset="0"/>
